--- a/HCWMPA&S/Cookbook/Cookbook for Practice 7.1.pptx
+++ b/HCWMPA&S/Cookbook/Cookbook for Practice 7.1.pptx
@@ -200,7 +200,7 @@
   <pc:docChgLst>
     <pc:chgData name="Li, Cong" userId="025630f4-267e-4cb3-8cd5-8795177f99f4" providerId="ADAL" clId="{929A2CC8-B112-421C-81E2-D5D63B23E300}"/>
     <pc:docChg chg="undo custSel addSld delSld modSld sldOrd">
-      <pc:chgData name="Li, Cong" userId="025630f4-267e-4cb3-8cd5-8795177f99f4" providerId="ADAL" clId="{929A2CC8-B112-421C-81E2-D5D63B23E300}" dt="2026-09-25T09:30:51.411" v="13447"/>
+      <pc:chgData name="Li, Cong" userId="025630f4-267e-4cb3-8cd5-8795177f99f4" providerId="ADAL" clId="{929A2CC8-B112-421C-81E2-D5D63B23E300}" dt="2026-09-26T01:02:29.018" v="13512" actId="20577"/>
       <pc:docMkLst>
         <pc:docMk/>
       </pc:docMkLst>
@@ -631,13 +631,13 @@
         </pc:sldMkLst>
       </pc:sldChg>
       <pc:sldChg chg="modSp add mod modAnim">
-        <pc:chgData name="Li, Cong" userId="025630f4-267e-4cb3-8cd5-8795177f99f4" providerId="ADAL" clId="{929A2CC8-B112-421C-81E2-D5D63B23E300}" dt="2026-09-25T08:08:29.213" v="10033" actId="1037"/>
+        <pc:chgData name="Li, Cong" userId="025630f4-267e-4cb3-8cd5-8795177f99f4" providerId="ADAL" clId="{929A2CC8-B112-421C-81E2-D5D63B23E300}" dt="2026-09-26T01:02:29.018" v="13512" actId="20577"/>
         <pc:sldMkLst>
           <pc:docMk/>
           <pc:sldMk cId="1838751765" sldId="440"/>
         </pc:sldMkLst>
         <pc:spChg chg="mod">
-          <ac:chgData name="Li, Cong" userId="025630f4-267e-4cb3-8cd5-8795177f99f4" providerId="ADAL" clId="{929A2CC8-B112-421C-81E2-D5D63B23E300}" dt="2026-09-25T08:08:29.213" v="10033" actId="1037"/>
+          <ac:chgData name="Li, Cong" userId="025630f4-267e-4cb3-8cd5-8795177f99f4" providerId="ADAL" clId="{929A2CC8-B112-421C-81E2-D5D63B23E300}" dt="2026-09-26T01:02:29.018" v="13512" actId="20577"/>
           <ac:spMkLst>
             <pc:docMk/>
             <pc:sldMk cId="1838751765" sldId="440"/>
@@ -645,7 +645,7 @@
           </ac:spMkLst>
         </pc:spChg>
         <pc:cxnChg chg="mod">
-          <ac:chgData name="Li, Cong" userId="025630f4-267e-4cb3-8cd5-8795177f99f4" providerId="ADAL" clId="{929A2CC8-B112-421C-81E2-D5D63B23E300}" dt="2026-09-25T08:08:29.213" v="10033" actId="1037"/>
+          <ac:chgData name="Li, Cong" userId="025630f4-267e-4cb3-8cd5-8795177f99f4" providerId="ADAL" clId="{929A2CC8-B112-421C-81E2-D5D63B23E300}" dt="2026-09-26T01:02:19.649" v="13504" actId="14100"/>
           <ac:cxnSpMkLst>
             <pc:docMk/>
             <pc:sldMk cId="1838751765" sldId="440"/>
@@ -11426,7 +11426,7 @@
         <p:spPr bwMode="auto">
           <a:xfrm flipH="1">
             <a:off x="4095585" y="4403777"/>
-            <a:ext cx="1219200" cy="0"/>
+            <a:ext cx="628815" cy="0"/>
           </a:xfrm>
           <a:prstGeom prst="straightConnector1">
             <a:avLst/>
@@ -11460,8 +11460,8 @@
         </p:nvSpPr>
         <p:spPr>
           <a:xfrm>
-            <a:off x="5314785" y="3511225"/>
-            <a:ext cx="3484659" cy="1785104"/>
+            <a:off x="4724400" y="3511225"/>
+            <a:ext cx="4206240" cy="1785104"/>
           </a:xfrm>
           <a:prstGeom prst="rect">
             <a:avLst/>
@@ -11479,14 +11479,14 @@
             <a:pPr algn="ctr"/>
             <a:r>
               <a:rPr lang="en-US" altLang="zh-CN" sz="2200" dirty="0"/>
-              <a:t>Output records in 1D array for simplicity in GPU programming</a:t>
+              <a:t>Output records in a flattened 1D array for simplicity in GPU programming</a:t>
             </a:r>
           </a:p>
           <a:p>
             <a:pPr algn="ctr"/>
             <a:r>
-              <a:rPr lang="zh-CN" altLang="en-US" sz="2200" dirty="0"/>
-              <a:t>用</a:t>
+              <a:rPr lang="zh-CN" altLang="en-US" sz="2200"/>
+              <a:t>用平铺的</a:t>
             </a:r>
             <a:r>
               <a:rPr lang="en-US" altLang="zh-CN" sz="2200" dirty="0"/>
